--- a/ablation/figures/ms-spatial-attention.pptx
+++ b/ablation/figures/ms-spatial-attention.pptx
@@ -3088,16 +3088,64 @@
         <p:nvPr/>
       </p:nvGrpSpPr>
       <p:grpSpPr/>
+      <p:sp>
+        <p:nvSpPr>
+          <p:cNvPr id="2" name="Rounded Rectangle 1"/>
+          <p:cNvSpPr/>
+          <p:nvPr/>
+        </p:nvSpPr>
+        <p:spPr>
+          <a:xfrm>
+            <a:off x="228600" y="1248967"/>
+            <a:ext cx="11734495" cy="4360064"/>
+          </a:xfrm>
+          <a:prstGeom prst="roundRect">
+            <a:avLst>
+              <a:gd name="adj" fmla="val 16000"/>
+            </a:avLst>
+          </a:prstGeom>
+          <a:solidFill>
+            <a:srgbClr val="FDFDFE"/>
+          </a:solidFill>
+          <a:ln w="17780">
+            <a:solidFill>
+              <a:srgbClr val="7E93A6"/>
+            </a:solidFill>
+          </a:ln>
+          <a:effectLst/>
+        </p:spPr>
+        <p:style>
+          <a:lnRef idx="1">
+            <a:schemeClr val="accent1"/>
+          </a:lnRef>
+          <a:fillRef idx="3">
+            <a:schemeClr val="accent1"/>
+          </a:fillRef>
+          <a:effectRef idx="2">
+            <a:schemeClr val="accent1"/>
+          </a:effectRef>
+          <a:fontRef idx="minor">
+            <a:schemeClr val="lt1"/>
+          </a:fontRef>
+        </p:style>
+        <p:txBody>
+          <a:bodyPr rtlCol="0" anchor="ctr" wrap="square" lIns="27000" rIns="27000" tIns="0" bIns="0"/>
+          <a:lstStyle/>
+          <a:p>
+            <a:pPr algn="ctr"/>
+          </a:p>
+        </p:txBody>
+      </p:sp>
       <p:cxnSp>
         <p:nvCxnSpPr>
-          <p:cNvPr id="2" name="Connector 1"/>
+          <p:cNvPr id="3" name="Connector 2"/>
           <p:cNvCxnSpPr/>
           <p:nvPr/>
         </p:nvCxnSpPr>
         <p:spPr>
           <a:xfrm>
-            <a:off x="1611327" y="3429000"/>
-            <a:ext cx="373710" cy="0"/>
+            <a:off x="1789610" y="3500770"/>
+            <a:ext cx="358853" cy="0"/>
           </a:xfrm>
           <a:prstGeom prst="line">
             <a:avLst/>
@@ -3106,42 +3154,6 @@
             <a:solidFill>
               <a:srgbClr val="25384B"/>
             </a:solidFill>
-          </a:ln>
-        </p:spPr>
-        <p:style>
-          <a:lnRef idx="2">
-            <a:schemeClr val="accent1"/>
-          </a:lnRef>
-          <a:fillRef idx="0">
-            <a:schemeClr val="accent1"/>
-          </a:fillRef>
-          <a:effectRef idx="1">
-            <a:schemeClr val="accent1"/>
-          </a:effectRef>
-          <a:fontRef idx="minor">
-            <a:schemeClr val="tx1"/>
-          </a:fontRef>
-        </p:style>
-      </p:cxnSp>
-      <p:cxnSp>
-        <p:nvCxnSpPr>
-          <p:cNvPr id="3" name="Connector 2"/>
-          <p:cNvCxnSpPr/>
-          <p:nvPr/>
-        </p:nvCxnSpPr>
-        <p:spPr>
-          <a:xfrm flipV="1">
-            <a:off x="1985037" y="2681579"/>
-            <a:ext cx="0" cy="747421"/>
-          </a:xfrm>
-          <a:prstGeom prst="line">
-            <a:avLst/>
-          </a:prstGeom>
-          <a:ln w="21590">
-            <a:solidFill>
-              <a:srgbClr val="25384B"/>
-            </a:solidFill>
-            <a:tailEnd type="triangle" w="med" len="med"/>
           </a:ln>
         </p:spPr>
         <p:style>
@@ -3166,9 +3178,9 @@
           <p:nvPr/>
         </p:nvCxnSpPr>
         <p:spPr>
-          <a:xfrm>
-            <a:off x="1611327" y="3429000"/>
-            <a:ext cx="373710" cy="0"/>
+          <a:xfrm flipV="1">
+            <a:off x="2148463" y="2783064"/>
+            <a:ext cx="0" cy="717706"/>
           </a:xfrm>
           <a:prstGeom prst="line">
             <a:avLst/>
@@ -3177,6 +3189,7 @@
             <a:solidFill>
               <a:srgbClr val="25384B"/>
             </a:solidFill>
+            <a:tailEnd type="triangle" w="med" len="med"/>
           </a:ln>
         </p:spPr>
         <p:style>
@@ -3202,8 +3215,8 @@
         </p:nvCxnSpPr>
         <p:spPr>
           <a:xfrm>
-            <a:off x="1985037" y="3429000"/>
-            <a:ext cx="0" cy="747420"/>
+            <a:off x="1789610" y="3500770"/>
+            <a:ext cx="358853" cy="0"/>
           </a:xfrm>
           <a:prstGeom prst="line">
             <a:avLst/>
@@ -3212,7 +3225,6 @@
             <a:solidFill>
               <a:srgbClr val="25384B"/>
             </a:solidFill>
-            <a:tailEnd type="triangle" w="med" len="med"/>
           </a:ln>
         </p:spPr>
         <p:style>
@@ -3238,8 +3250,8 @@
         </p:nvCxnSpPr>
         <p:spPr>
           <a:xfrm>
-            <a:off x="3461191" y="2681579"/>
-            <a:ext cx="355025" cy="0"/>
+            <a:off x="2148463" y="3500770"/>
+            <a:ext cx="0" cy="717706"/>
           </a:xfrm>
           <a:prstGeom prst="line">
             <a:avLst/>
@@ -3248,6 +3260,7 @@
             <a:solidFill>
               <a:srgbClr val="25384B"/>
             </a:solidFill>
+            <a:tailEnd type="triangle" w="med" len="med"/>
           </a:ln>
         </p:spPr>
         <p:style>
@@ -3273,8 +3286,8 @@
         </p:nvCxnSpPr>
         <p:spPr>
           <a:xfrm>
-            <a:off x="3816216" y="2681579"/>
-            <a:ext cx="0" cy="747421"/>
+            <a:off x="3565933" y="2783064"/>
+            <a:ext cx="340910" cy="0"/>
           </a:xfrm>
           <a:prstGeom prst="line">
             <a:avLst/>
@@ -3283,7 +3296,6 @@
             <a:solidFill>
               <a:srgbClr val="25384B"/>
             </a:solidFill>
-            <a:tailEnd type="triangle" w="med" len="med"/>
           </a:ln>
         </p:spPr>
         <p:style>
@@ -3309,8 +3321,8 @@
         </p:nvCxnSpPr>
         <p:spPr>
           <a:xfrm>
-            <a:off x="3461191" y="4176420"/>
-            <a:ext cx="355025" cy="0"/>
+            <a:off x="3906843" y="2783064"/>
+            <a:ext cx="0" cy="717706"/>
           </a:xfrm>
           <a:prstGeom prst="line">
             <a:avLst/>
@@ -3319,6 +3331,7 @@
             <a:solidFill>
               <a:srgbClr val="25384B"/>
             </a:solidFill>
+            <a:tailEnd type="triangle" w="med" len="med"/>
           </a:ln>
         </p:spPr>
         <p:style>
@@ -3343,9 +3356,9 @@
           <p:nvPr/>
         </p:nvCxnSpPr>
         <p:spPr>
-          <a:xfrm flipV="1">
-            <a:off x="3816216" y="3429000"/>
-            <a:ext cx="0" cy="747420"/>
+          <a:xfrm>
+            <a:off x="3565933" y="4218476"/>
+            <a:ext cx="340910" cy="0"/>
           </a:xfrm>
           <a:prstGeom prst="line">
             <a:avLst/>
@@ -3354,7 +3367,6 @@
             <a:solidFill>
               <a:srgbClr val="25384B"/>
             </a:solidFill>
-            <a:tailEnd type="triangle" w="med" len="med"/>
           </a:ln>
         </p:spPr>
         <p:style>
@@ -3379,9 +3391,9 @@
           <p:nvPr/>
         </p:nvCxnSpPr>
         <p:spPr>
-          <a:xfrm>
-            <a:off x="5198943" y="3429000"/>
-            <a:ext cx="177512" cy="0"/>
+          <a:xfrm flipV="1">
+            <a:off x="3906843" y="3500770"/>
+            <a:ext cx="0" cy="717706"/>
           </a:xfrm>
           <a:prstGeom prst="line">
             <a:avLst/>
@@ -3390,6 +3402,7 @@
             <a:solidFill>
               <a:srgbClr val="25384B"/>
             </a:solidFill>
+            <a:tailEnd type="triangle" w="med" len="med"/>
           </a:ln>
         </p:spPr>
         <p:style>
@@ -3414,9 +3427,9 @@
           <p:nvPr/>
         </p:nvCxnSpPr>
         <p:spPr>
-          <a:xfrm flipV="1">
-            <a:off x="5376455" y="1934159"/>
-            <a:ext cx="0" cy="1494841"/>
+          <a:xfrm>
+            <a:off x="5234600" y="3500770"/>
+            <a:ext cx="170455" cy="0"/>
           </a:xfrm>
           <a:prstGeom prst="line">
             <a:avLst/>
@@ -3449,9 +3462,9 @@
           <p:nvPr/>
         </p:nvCxnSpPr>
         <p:spPr>
-          <a:xfrm>
-            <a:off x="5376455" y="1934159"/>
-            <a:ext cx="177513" cy="0"/>
+          <a:xfrm flipV="1">
+            <a:off x="5405055" y="2065358"/>
+            <a:ext cx="0" cy="1435412"/>
           </a:xfrm>
           <a:prstGeom prst="line">
             <a:avLst/>
@@ -3460,7 +3473,6 @@
             <a:solidFill>
               <a:srgbClr val="25384B"/>
             </a:solidFill>
-            <a:tailEnd type="triangle" w="med" len="med"/>
           </a:ln>
         </p:spPr>
         <p:style>
@@ -3486,8 +3498,8 @@
         </p:nvCxnSpPr>
         <p:spPr>
           <a:xfrm>
-            <a:off x="5198943" y="3429000"/>
-            <a:ext cx="355025" cy="0"/>
+            <a:off x="5405055" y="2065358"/>
+            <a:ext cx="170455" cy="0"/>
           </a:xfrm>
           <a:prstGeom prst="line">
             <a:avLst/>
@@ -3522,8 +3534,8 @@
         </p:nvCxnSpPr>
         <p:spPr>
           <a:xfrm>
-            <a:off x="5198943" y="3429000"/>
-            <a:ext cx="177512" cy="0"/>
+            <a:off x="5234600" y="3500770"/>
+            <a:ext cx="340910" cy="0"/>
           </a:xfrm>
           <a:prstGeom prst="line">
             <a:avLst/>
@@ -3532,6 +3544,7 @@
             <a:solidFill>
               <a:srgbClr val="25384B"/>
             </a:solidFill>
+            <a:tailEnd type="triangle" w="med" len="med"/>
           </a:ln>
         </p:spPr>
         <p:style>
@@ -3557,8 +3570,8 @@
         </p:nvCxnSpPr>
         <p:spPr>
           <a:xfrm>
-            <a:off x="5376455" y="3429000"/>
-            <a:ext cx="0" cy="1494840"/>
+            <a:off x="5234600" y="3500770"/>
+            <a:ext cx="170455" cy="0"/>
           </a:xfrm>
           <a:prstGeom prst="line">
             <a:avLst/>
@@ -3592,8 +3605,8 @@
         </p:nvCxnSpPr>
         <p:spPr>
           <a:xfrm>
-            <a:off x="5376455" y="4923840"/>
-            <a:ext cx="177513" cy="0"/>
+            <a:off x="5405055" y="3500770"/>
+            <a:ext cx="0" cy="1435412"/>
           </a:xfrm>
           <a:prstGeom prst="line">
             <a:avLst/>
@@ -3602,7 +3615,6 @@
             <a:solidFill>
               <a:srgbClr val="25384B"/>
             </a:solidFill>
-            <a:tailEnd type="triangle" w="med" len="med"/>
           </a:ln>
         </p:spPr>
         <p:style>
@@ -3628,8 +3640,8 @@
         </p:nvCxnSpPr>
         <p:spPr>
           <a:xfrm>
-            <a:off x="7030122" y="1934159"/>
-            <a:ext cx="177512" cy="0"/>
+            <a:off x="5405055" y="4936182"/>
+            <a:ext cx="170455" cy="0"/>
           </a:xfrm>
           <a:prstGeom prst="line">
             <a:avLst/>
@@ -3638,6 +3650,7 @@
             <a:solidFill>
               <a:srgbClr val="25384B"/>
             </a:solidFill>
+            <a:tailEnd type="triangle" w="med" len="med"/>
           </a:ln>
         </p:spPr>
         <p:style>
@@ -3663,8 +3676,8 @@
         </p:nvCxnSpPr>
         <p:spPr>
           <a:xfrm>
-            <a:off x="7207634" y="1934159"/>
-            <a:ext cx="0" cy="1494841"/>
+            <a:off x="6992980" y="2065358"/>
+            <a:ext cx="170455" cy="0"/>
           </a:xfrm>
           <a:prstGeom prst="line">
             <a:avLst/>
@@ -3698,8 +3711,8 @@
         </p:nvCxnSpPr>
         <p:spPr>
           <a:xfrm>
-            <a:off x="7207634" y="3429000"/>
-            <a:ext cx="177513" cy="0"/>
+            <a:off x="7163435" y="2065358"/>
+            <a:ext cx="0" cy="1435412"/>
           </a:xfrm>
           <a:prstGeom prst="line">
             <a:avLst/>
@@ -3708,7 +3721,6 @@
             <a:solidFill>
               <a:srgbClr val="25384B"/>
             </a:solidFill>
-            <a:tailEnd type="triangle" w="med" len="med"/>
           </a:ln>
         </p:spPr>
         <p:style>
@@ -3734,8 +3746,8 @@
         </p:nvCxnSpPr>
         <p:spPr>
           <a:xfrm>
-            <a:off x="7030122" y="3429000"/>
-            <a:ext cx="355025" cy="0"/>
+            <a:off x="7163435" y="3500770"/>
+            <a:ext cx="170455" cy="0"/>
           </a:xfrm>
           <a:prstGeom prst="line">
             <a:avLst/>
@@ -3770,8 +3782,8 @@
         </p:nvCxnSpPr>
         <p:spPr>
           <a:xfrm>
-            <a:off x="7030122" y="4923840"/>
-            <a:ext cx="177512" cy="0"/>
+            <a:off x="6992980" y="3500770"/>
+            <a:ext cx="340910" cy="0"/>
           </a:xfrm>
           <a:prstGeom prst="line">
             <a:avLst/>
@@ -3780,6 +3792,7 @@
             <a:solidFill>
               <a:srgbClr val="25384B"/>
             </a:solidFill>
+            <a:tailEnd type="triangle" w="med" len="med"/>
           </a:ln>
         </p:spPr>
         <p:style>
@@ -3804,9 +3817,9 @@
           <p:nvPr/>
         </p:nvCxnSpPr>
         <p:spPr>
-          <a:xfrm flipV="1">
-            <a:off x="7207634" y="3429000"/>
-            <a:ext cx="0" cy="1494840"/>
+          <a:xfrm>
+            <a:off x="6992980" y="4936182"/>
+            <a:ext cx="170455" cy="0"/>
           </a:xfrm>
           <a:prstGeom prst="line">
             <a:avLst/>
@@ -3839,9 +3852,9 @@
           <p:nvPr/>
         </p:nvCxnSpPr>
         <p:spPr>
-          <a:xfrm>
-            <a:off x="7207634" y="3429000"/>
-            <a:ext cx="177513" cy="0"/>
+          <a:xfrm flipV="1">
+            <a:off x="7163435" y="3500770"/>
+            <a:ext cx="0" cy="1435412"/>
           </a:xfrm>
           <a:prstGeom prst="line">
             <a:avLst/>
@@ -3850,7 +3863,6 @@
             <a:solidFill>
               <a:srgbClr val="25384B"/>
             </a:solidFill>
-            <a:tailEnd type="triangle" w="med" len="med"/>
           </a:ln>
         </p:spPr>
         <p:style>
@@ -3876,8 +3888,8 @@
         </p:nvCxnSpPr>
         <p:spPr>
           <a:xfrm>
-            <a:off x="7814913" y="3429000"/>
-            <a:ext cx="373710" cy="0"/>
+            <a:off x="7163435" y="3500770"/>
+            <a:ext cx="170455" cy="0"/>
           </a:xfrm>
           <a:prstGeom prst="line">
             <a:avLst/>
@@ -3912,8 +3924,8 @@
         </p:nvCxnSpPr>
         <p:spPr>
           <a:xfrm>
-            <a:off x="9403181" y="3429000"/>
-            <a:ext cx="373710" cy="0"/>
+            <a:off x="7746571" y="3500770"/>
+            <a:ext cx="358853" cy="0"/>
           </a:xfrm>
           <a:prstGeom prst="line">
             <a:avLst/>
@@ -3948,8 +3960,8 @@
         </p:nvCxnSpPr>
         <p:spPr>
           <a:xfrm>
-            <a:off x="10206658" y="3429000"/>
-            <a:ext cx="373710" cy="0"/>
+            <a:off x="9271697" y="3500770"/>
+            <a:ext cx="358853" cy="0"/>
           </a:xfrm>
           <a:prstGeom prst="line">
             <a:avLst/>
@@ -3984,16 +3996,17 @@
         </p:nvCxnSpPr>
         <p:spPr>
           <a:xfrm>
-            <a:off x="919963" y="3718625"/>
-            <a:ext cx="0" cy="1663009"/>
+            <a:off x="10043231" y="3500770"/>
+            <a:ext cx="358853" cy="0"/>
           </a:xfrm>
           <a:prstGeom prst="line">
             <a:avLst/>
           </a:prstGeom>
-          <a:ln w="16510">
+          <a:ln w="21590">
             <a:solidFill>
-              <a:srgbClr val="6E8399"/>
+              <a:srgbClr val="25384B"/>
             </a:solidFill>
+            <a:tailEnd type="triangle" w="med" len="med"/>
           </a:ln>
         </p:spPr>
         <p:style>
@@ -4019,8 +4032,8 @@
         </p:nvCxnSpPr>
         <p:spPr>
           <a:xfrm>
-            <a:off x="919963" y="5381634"/>
-            <a:ext cx="9071811" cy="0"/>
+            <a:off x="1125732" y="3778881"/>
+            <a:ext cx="0" cy="1596896"/>
           </a:xfrm>
           <a:prstGeom prst="line">
             <a:avLst/>
@@ -4053,9 +4066,44 @@
           <p:nvPr/>
         </p:nvCxnSpPr>
         <p:spPr>
+          <a:xfrm>
+            <a:off x="1125732" y="5375777"/>
+            <a:ext cx="8711158" cy="0"/>
+          </a:xfrm>
+          <a:prstGeom prst="line">
+            <a:avLst/>
+          </a:prstGeom>
+          <a:ln w="16510">
+            <a:solidFill>
+              <a:srgbClr val="6E8399"/>
+            </a:solidFill>
+          </a:ln>
+        </p:spPr>
+        <p:style>
+          <a:lnRef idx="2">
+            <a:schemeClr val="accent1"/>
+          </a:lnRef>
+          <a:fillRef idx="0">
+            <a:schemeClr val="accent1"/>
+          </a:fillRef>
+          <a:effectRef idx="1">
+            <a:schemeClr val="accent1"/>
+          </a:effectRef>
+          <a:fontRef idx="minor">
+            <a:schemeClr val="tx1"/>
+          </a:fontRef>
+        </p:style>
+      </p:cxnSp>
+      <p:cxnSp>
+        <p:nvCxnSpPr>
+          <p:cNvPr id="30" name="Connector 29"/>
+          <p:cNvCxnSpPr/>
+          <p:nvPr/>
+        </p:nvCxnSpPr>
+        <p:spPr>
           <a:xfrm flipV="1">
-            <a:off x="9991774" y="3643883"/>
-            <a:ext cx="0" cy="1737751"/>
+            <a:off x="9836890" y="3707111"/>
+            <a:ext cx="0" cy="1668666"/>
           </a:xfrm>
           <a:prstGeom prst="line">
             <a:avLst/>
@@ -4084,14 +4132,14 @@
       </p:cxnSp>
       <p:sp>
         <p:nvSpPr>
-          <p:cNvPr id="30" name="Rounded Rectangle 29"/>
+          <p:cNvPr id="31" name="Rounded Rectangle 30"/>
           <p:cNvSpPr/>
           <p:nvPr/>
         </p:nvSpPr>
         <p:spPr>
           <a:xfrm>
-            <a:off x="228600" y="3139374"/>
-            <a:ext cx="1382727" cy="579250"/>
+            <a:off x="461854" y="3222659"/>
+            <a:ext cx="1327756" cy="556222"/>
           </a:xfrm>
           <a:prstGeom prst="roundRect">
             <a:avLst>
@@ -4153,14 +4201,14 @@
       </p:sp>
       <p:sp>
         <p:nvSpPr>
-          <p:cNvPr id="31" name="Rounded Rectangle 30"/>
+          <p:cNvPr id="32" name="Rounded Rectangle 31"/>
           <p:cNvSpPr/>
           <p:nvPr/>
         </p:nvSpPr>
         <p:spPr>
           <a:xfrm>
-            <a:off x="1985037" y="2391954"/>
-            <a:ext cx="1476154" cy="579250"/>
+            <a:off x="2148463" y="2504953"/>
+            <a:ext cx="1417469" cy="556222"/>
           </a:xfrm>
           <a:prstGeom prst="roundRect">
             <a:avLst>
@@ -4222,14 +4270,14 @@
       </p:sp>
       <p:sp>
         <p:nvSpPr>
-          <p:cNvPr id="32" name="Rounded Rectangle 31"/>
+          <p:cNvPr id="33" name="Rounded Rectangle 32"/>
           <p:cNvSpPr/>
           <p:nvPr/>
         </p:nvSpPr>
         <p:spPr>
           <a:xfrm>
-            <a:off x="1985037" y="3886794"/>
-            <a:ext cx="1476154" cy="579250"/>
+            <a:off x="2148463" y="3940365"/>
+            <a:ext cx="1417469" cy="556222"/>
           </a:xfrm>
           <a:prstGeom prst="roundRect">
             <a:avLst>
@@ -4291,14 +4339,14 @@
       </p:sp>
       <p:sp>
         <p:nvSpPr>
-          <p:cNvPr id="33" name="Rounded Rectangle 32"/>
+          <p:cNvPr id="34" name="Rounded Rectangle 33"/>
           <p:cNvSpPr/>
           <p:nvPr/>
         </p:nvSpPr>
         <p:spPr>
           <a:xfrm>
-            <a:off x="3816216" y="3139374"/>
-            <a:ext cx="1382727" cy="579250"/>
+            <a:off x="3906843" y="3222659"/>
+            <a:ext cx="1327756" cy="556222"/>
           </a:xfrm>
           <a:prstGeom prst="roundRect">
             <a:avLst>
@@ -4360,14 +4408,14 @@
       </p:sp>
       <p:sp>
         <p:nvSpPr>
-          <p:cNvPr id="34" name="Rounded Rectangle 33"/>
+          <p:cNvPr id="35" name="Rounded Rectangle 34"/>
           <p:cNvSpPr/>
           <p:nvPr/>
         </p:nvSpPr>
         <p:spPr>
           <a:xfrm>
-            <a:off x="5553968" y="1644534"/>
-            <a:ext cx="1476154" cy="579250"/>
+            <a:off x="5575510" y="1787247"/>
+            <a:ext cx="1417469" cy="556222"/>
           </a:xfrm>
           <a:prstGeom prst="roundRect">
             <a:avLst>
@@ -4429,14 +4477,14 @@
       </p:sp>
       <p:sp>
         <p:nvSpPr>
-          <p:cNvPr id="35" name="Rounded Rectangle 34"/>
+          <p:cNvPr id="36" name="Rounded Rectangle 35"/>
           <p:cNvSpPr/>
           <p:nvPr/>
         </p:nvSpPr>
         <p:spPr>
           <a:xfrm>
-            <a:off x="5553968" y="3139374"/>
-            <a:ext cx="1476154" cy="579250"/>
+            <a:off x="5575510" y="3222659"/>
+            <a:ext cx="1417469" cy="556222"/>
           </a:xfrm>
           <a:prstGeom prst="roundRect">
             <a:avLst>
@@ -4498,14 +4546,14 @@
       </p:sp>
       <p:sp>
         <p:nvSpPr>
-          <p:cNvPr id="36" name="Rounded Rectangle 35"/>
+          <p:cNvPr id="37" name="Rounded Rectangle 36"/>
           <p:cNvSpPr/>
           <p:nvPr/>
         </p:nvSpPr>
         <p:spPr>
           <a:xfrm>
-            <a:off x="5553968" y="4634214"/>
-            <a:ext cx="1476154" cy="579250"/>
+            <a:off x="5575510" y="4658071"/>
+            <a:ext cx="1417469" cy="556222"/>
           </a:xfrm>
           <a:prstGeom prst="roundRect">
             <a:avLst>
@@ -4567,14 +4615,14 @@
       </p:sp>
       <p:sp>
         <p:nvSpPr>
-          <p:cNvPr id="37" name="Rounded Rectangle 36"/>
+          <p:cNvPr id="38" name="Rounded Rectangle 37"/>
           <p:cNvSpPr/>
           <p:nvPr/>
         </p:nvSpPr>
         <p:spPr>
           <a:xfrm>
-            <a:off x="7385147" y="3214116"/>
-            <a:ext cx="429766" cy="429766"/>
+            <a:off x="7333890" y="3294430"/>
+            <a:ext cx="412681" cy="412681"/>
           </a:xfrm>
           <a:prstGeom prst="roundRect">
             <a:avLst>
@@ -4624,14 +4672,14 @@
       </p:sp>
       <p:sp>
         <p:nvSpPr>
-          <p:cNvPr id="38" name="Rounded Rectangle 37"/>
+          <p:cNvPr id="39" name="Rounded Rectangle 38"/>
           <p:cNvSpPr/>
           <p:nvPr/>
         </p:nvSpPr>
         <p:spPr>
           <a:xfrm>
-            <a:off x="8188623" y="3139374"/>
-            <a:ext cx="1214557" cy="579250"/>
+            <a:off x="8105424" y="3222659"/>
+            <a:ext cx="1166272" cy="556222"/>
           </a:xfrm>
           <a:prstGeom prst="roundRect">
             <a:avLst>
@@ -4693,14 +4741,14 @@
       </p:sp>
       <p:sp>
         <p:nvSpPr>
-          <p:cNvPr id="39" name="Rounded Rectangle 38"/>
+          <p:cNvPr id="40" name="Rounded Rectangle 39"/>
           <p:cNvSpPr/>
           <p:nvPr/>
         </p:nvSpPr>
         <p:spPr>
           <a:xfrm>
-            <a:off x="9776891" y="3214116"/>
-            <a:ext cx="429766" cy="429766"/>
+            <a:off x="9630550" y="3294430"/>
+            <a:ext cx="412681" cy="412681"/>
           </a:xfrm>
           <a:prstGeom prst="roundRect">
             <a:avLst>
@@ -4750,14 +4798,14 @@
       </p:sp>
       <p:sp>
         <p:nvSpPr>
-          <p:cNvPr id="40" name="Rounded Rectangle 39"/>
+          <p:cNvPr id="41" name="Rounded Rectangle 40"/>
           <p:cNvSpPr/>
           <p:nvPr/>
         </p:nvSpPr>
         <p:spPr>
           <a:xfrm>
-            <a:off x="10580368" y="3139374"/>
-            <a:ext cx="1382727" cy="579250"/>
+            <a:off x="10402084" y="3222659"/>
+            <a:ext cx="1327756" cy="556222"/>
           </a:xfrm>
           <a:prstGeom prst="roundRect">
             <a:avLst>
@@ -4819,14 +4867,14 @@
       </p:sp>
       <p:sp>
         <p:nvSpPr>
-          <p:cNvPr id="41" name="Rounded Rectangle 40"/>
+          <p:cNvPr id="42" name="Rounded Rectangle 41"/>
           <p:cNvSpPr/>
           <p:nvPr/>
         </p:nvSpPr>
         <p:spPr>
           <a:xfrm>
-            <a:off x="228600" y="1476365"/>
-            <a:ext cx="5605650" cy="242911"/>
+            <a:off x="408026" y="1356623"/>
+            <a:ext cx="5382795" cy="233254"/>
           </a:xfrm>
           <a:prstGeom prst="roundRect">
             <a:avLst>

--- a/ablation/figures/ms-spatial-attention.pptx
+++ b/ablation/figures/ms-spatial-attention.pptx
@@ -4038,9 +4038,9 @@
           <a:prstGeom prst="line">
             <a:avLst/>
           </a:prstGeom>
-          <a:ln w="16510">
+          <a:ln w="19050">
             <a:solidFill>
-              <a:srgbClr val="6E8399"/>
+              <a:srgbClr val="5C748C"/>
             </a:solidFill>
           </a:ln>
         </p:spPr>
@@ -4073,9 +4073,9 @@
           <a:prstGeom prst="line">
             <a:avLst/>
           </a:prstGeom>
-          <a:ln w="16510">
+          <a:ln w="19050">
             <a:solidFill>
-              <a:srgbClr val="6E8399"/>
+              <a:srgbClr val="5C748C"/>
             </a:solidFill>
           </a:ln>
         </p:spPr>
@@ -4108,9 +4108,9 @@
           <a:prstGeom prst="line">
             <a:avLst/>
           </a:prstGeom>
-          <a:ln w="16510">
+          <a:ln w="19050">
             <a:solidFill>
-              <a:srgbClr val="6E8399"/>
+              <a:srgbClr val="5C748C"/>
             </a:solidFill>
             <a:tailEnd type="triangle" w="med" len="med"/>
           </a:ln>
